--- a/presentation/Healthcare Duplicate MRN Continuous Improvement Analysis.pptx
+++ b/presentation/Healthcare Duplicate MRN Continuous Improvement Analysis.pptx
@@ -204,7 +204,7 @@
           <a:p>
             <a:fld id="{6DDFC07B-46B5-40A7-B02D-48D2AC2BB881}" type="datetimeFigureOut">
               <a:rPr lang="en-US" smtClean="0"/>
-              <a:t>7/4/2026</a:t>
+              <a:t>7/6/2026</a:t>
             </a:fld>
             <a:endParaRPr lang="en-US"/>
           </a:p>
@@ -7873,8 +7873,8 @@
         </p:nvSpPr>
         <p:spPr>
           <a:xfrm>
-            <a:off x="8087171" y="1706726"/>
-            <a:ext cx="3383280" cy="2560320"/>
+            <a:off x="8087171" y="1557641"/>
+            <a:ext cx="3383280" cy="2743200"/>
           </a:xfrm>
           <a:prstGeom prst="roundRect">
             <a:avLst/>
@@ -7977,8 +7977,8 @@
         </p:nvSpPr>
         <p:spPr>
           <a:xfrm>
-            <a:off x="4448556" y="1706726"/>
-            <a:ext cx="3383280" cy="2560320"/>
+            <a:off x="4448556" y="1557641"/>
+            <a:ext cx="3383280" cy="2743200"/>
           </a:xfrm>
           <a:prstGeom prst="roundRect">
             <a:avLst/>
@@ -8029,8 +8029,8 @@
         </p:nvSpPr>
         <p:spPr>
           <a:xfrm>
-            <a:off x="809941" y="1717351"/>
-            <a:ext cx="3383280" cy="2560320"/>
+            <a:off x="809941" y="1568266"/>
+            <a:ext cx="3383280" cy="2743200"/>
           </a:xfrm>
           <a:prstGeom prst="roundRect">
             <a:avLst/>
@@ -8085,7 +8085,7 @@
         </p:nvSpPr>
         <p:spPr>
           <a:xfrm>
-            <a:off x="2057400" y="272525"/>
+            <a:off x="2057400" y="153257"/>
             <a:ext cx="9296400" cy="1325563"/>
           </a:xfrm>
         </p:spPr>
@@ -8122,7 +8122,7 @@
         </p:nvSpPr>
         <p:spPr>
           <a:xfrm>
-            <a:off x="955968" y="1859521"/>
+            <a:off x="955968" y="1650802"/>
             <a:ext cx="3200400" cy="2157984"/>
           </a:xfrm>
         </p:spPr>
@@ -8209,7 +8209,7 @@
         </p:nvSpPr>
         <p:spPr>
           <a:xfrm>
-            <a:off x="4631436" y="1846074"/>
+            <a:off x="4631436" y="1637355"/>
             <a:ext cx="3200400" cy="2153593"/>
           </a:xfrm>
           <a:prstGeom prst="rect">
@@ -8394,7 +8394,7 @@
                   <a:srgbClr val="1B491D"/>
                 </a:solidFill>
               </a:rPr>
-              <a:t>Reinforce Reliable Search Method</a:t>
+              <a:t>Reinforce Reliable Search Method (RSM)</a:t>
             </a:r>
           </a:p>
           <a:p>
@@ -8402,8 +8402,8 @@
               <a:buNone/>
             </a:pPr>
             <a:r>
-              <a:rPr lang="en-US" sz="1700" dirty="0"/>
-              <a:t>Send targeted email reminders and the Reliable Search Method guide to external providers with higher duplicate creation rates.</a:t>
+              <a:rPr lang="en-US" sz="1800" dirty="0"/>
+              <a:t>Reinforce the RSM for internal registration staff and external providers through refresher education and targeted reminders.</a:t>
             </a:r>
           </a:p>
           <a:p>
@@ -8900,7 +8900,7 @@
         </p:nvCxnSpPr>
         <p:spPr>
           <a:xfrm>
-            <a:off x="1338858" y="1538285"/>
+            <a:off x="1338858" y="1419017"/>
             <a:ext cx="9514285" cy="0"/>
           </a:xfrm>
           <a:prstGeom prst="line">
@@ -8955,7 +8955,7 @@
         </p:blipFill>
         <p:spPr>
           <a:xfrm>
-            <a:off x="1338858" y="639845"/>
+            <a:off x="1338858" y="520577"/>
             <a:ext cx="718542" cy="718542"/>
           </a:xfrm>
           <a:prstGeom prst="rect">
@@ -8977,7 +8977,7 @@
         </p:nvSpPr>
         <p:spPr>
           <a:xfrm>
-            <a:off x="2077656" y="1179542"/>
+            <a:off x="2077656" y="1060274"/>
             <a:ext cx="6489486" cy="307777"/>
           </a:xfrm>
           <a:prstGeom prst="rect">
@@ -9021,7 +9021,7 @@
         </p:nvSpPr>
         <p:spPr>
           <a:xfrm>
-            <a:off x="8206045" y="1859521"/>
+            <a:off x="8206045" y="1650802"/>
             <a:ext cx="3200400" cy="2153593"/>
           </a:xfrm>
           <a:prstGeom prst="rect">

--- a/presentation/Healthcare Duplicate MRN Continuous Improvement Analysis.pptx
+++ b/presentation/Healthcare Duplicate MRN Continuous Improvement Analysis.pptx
@@ -7821,8 +7821,8 @@
         </p:nvSpPr>
         <p:spPr>
           <a:xfrm>
-            <a:off x="6301560" y="4433560"/>
-            <a:ext cx="5120640" cy="1922790"/>
+            <a:off x="6152475" y="4433560"/>
+            <a:ext cx="5486400" cy="1922790"/>
           </a:xfrm>
           <a:prstGeom prst="roundRect">
             <a:avLst/>
@@ -7873,8 +7873,8 @@
         </p:nvSpPr>
         <p:spPr>
           <a:xfrm>
-            <a:off x="8087171" y="1557641"/>
-            <a:ext cx="3383280" cy="2743200"/>
+            <a:off x="8037476" y="1557641"/>
+            <a:ext cx="3657600" cy="2743200"/>
           </a:xfrm>
           <a:prstGeom prst="roundRect">
             <a:avLst/>
@@ -7925,8 +7925,8 @@
         </p:nvSpPr>
         <p:spPr>
           <a:xfrm>
-            <a:off x="971305" y="4433560"/>
-            <a:ext cx="5120640" cy="1922790"/>
+            <a:off x="603562" y="4433560"/>
+            <a:ext cx="5486400" cy="1922790"/>
           </a:xfrm>
           <a:prstGeom prst="roundRect">
             <a:avLst/>
@@ -7977,8 +7977,8 @@
         </p:nvSpPr>
         <p:spPr>
           <a:xfrm>
-            <a:off x="4448556" y="1557641"/>
-            <a:ext cx="3383280" cy="2743200"/>
+            <a:off x="4281960" y="1557641"/>
+            <a:ext cx="3657600" cy="2743200"/>
           </a:xfrm>
           <a:prstGeom prst="roundRect">
             <a:avLst/>
@@ -8029,8 +8029,8 @@
         </p:nvSpPr>
         <p:spPr>
           <a:xfrm>
-            <a:off x="809941" y="1568266"/>
-            <a:ext cx="3383280" cy="2743200"/>
+            <a:off x="528022" y="1568266"/>
+            <a:ext cx="3657600" cy="2743200"/>
           </a:xfrm>
           <a:prstGeom prst="roundRect">
             <a:avLst/>
@@ -8122,8 +8122,8 @@
         </p:nvSpPr>
         <p:spPr>
           <a:xfrm>
-            <a:off x="955968" y="1650802"/>
-            <a:ext cx="3200400" cy="2157984"/>
+            <a:off x="646755" y="1658718"/>
+            <a:ext cx="3420133" cy="2157984"/>
           </a:xfrm>
         </p:spPr>
         <p:txBody>
@@ -8209,8 +8209,8 @@
         </p:nvSpPr>
         <p:spPr>
           <a:xfrm>
-            <a:off x="4631436" y="1637355"/>
-            <a:ext cx="3200400" cy="2153593"/>
+            <a:off x="4453301" y="1654521"/>
+            <a:ext cx="3486259" cy="2153593"/>
           </a:xfrm>
           <a:prstGeom prst="rect">
             <a:avLst/>
@@ -8434,8 +8434,8 @@
         </p:nvSpPr>
         <p:spPr>
           <a:xfrm>
-            <a:off x="1117332" y="4536847"/>
-            <a:ext cx="5505201" cy="1511904"/>
+            <a:off x="775255" y="4536847"/>
+            <a:ext cx="5171660" cy="1511904"/>
           </a:xfrm>
           <a:prstGeom prst="rect">
             <a:avLst/>
@@ -8664,8 +8664,8 @@
         </p:nvSpPr>
         <p:spPr>
           <a:xfrm>
-            <a:off x="6582870" y="4536847"/>
-            <a:ext cx="4892039" cy="1953613"/>
+            <a:off x="6341167" y="4536847"/>
+            <a:ext cx="5334031" cy="1953613"/>
           </a:xfrm>
           <a:prstGeom prst="rect">
             <a:avLst/>
@@ -9021,8 +9021,8 @@
         </p:nvSpPr>
         <p:spPr>
           <a:xfrm>
-            <a:off x="8206045" y="1650802"/>
-            <a:ext cx="3200400" cy="2153593"/>
+            <a:off x="8199892" y="1650802"/>
+            <a:ext cx="3538726" cy="2153593"/>
           </a:xfrm>
           <a:prstGeom prst="rect">
             <a:avLst/>
@@ -9206,21 +9206,32 @@
                   <a:srgbClr val="1B491D"/>
                 </a:solidFill>
               </a:rPr>
-              <a:t>Reinforce STAR Safety Tool</a:t>
-            </a:r>
-            <a:endParaRPr lang="en-US" sz="1900" dirty="0">
-              <a:solidFill>
-                <a:srgbClr val="1B491D"/>
-              </a:solidFill>
-            </a:endParaRPr>
+              <a:t>Reinforce Registration Safety Tools</a:t>
+            </a:r>
           </a:p>
           <a:p>
             <a:pPr marL="0" indent="0">
               <a:buNone/>
             </a:pPr>
             <a:r>
-              <a:rPr lang="en-US" sz="1700" dirty="0"/>
-              <a:t>Reinforce use of STAR (Stop, Think, Act, Review) during patient registration to reduce data entry errors.</a:t>
+              <a:rPr lang="en-US" sz="1800" dirty="0"/>
+              <a:t>Reinforce use of  safety tools such as </a:t>
+            </a:r>
+            <a:r>
+              <a:rPr lang="en-US" sz="1800" b="1" dirty="0"/>
+              <a:t>STAR (Stop, Think, Act, Review)</a:t>
+            </a:r>
+            <a:r>
+              <a:rPr lang="en-US" sz="1800" dirty="0"/>
+              <a:t> and </a:t>
+            </a:r>
+            <a:r>
+              <a:rPr lang="en-US" sz="1800" b="1" dirty="0"/>
+              <a:t>Repeat-Back</a:t>
+            </a:r>
+            <a:r>
+              <a:rPr lang="en-US" sz="1800" dirty="0"/>
+              <a:t> during registration to verify patient information before completing registration.</a:t>
             </a:r>
           </a:p>
           <a:p>

--- a/presentation/Healthcare Duplicate MRN Continuous Improvement Analysis.pptx
+++ b/presentation/Healthcare Duplicate MRN Continuous Improvement Analysis.pptx
@@ -9231,7 +9231,7 @@
             </a:r>
             <a:r>
               <a:rPr lang="en-US" sz="1800" dirty="0"/>
-              <a:t> during registration to verify patient information before completing registration.</a:t>
+              <a:t> to ensure accurate chart registration and searches.</a:t>
             </a:r>
           </a:p>
           <a:p>
